--- a/AWSシングルクラウドVer/docs/01_management/sprint2/証跡/Story3-6/Story3-6テスト証跡.pptx
+++ b/AWSシングルクラウドVer/docs/01_management/sprint2/証跡/Story3-6/Story3-6テスト証跡.pptx
@@ -110,6 +110,11 @@
       </a:defRPr>
     </a:lvl9pPr>
   </p:defaultTextStyle>
+  <p:extLst>
+    <p:ext uri="{EFAFB233-063F-42B5-8137-9DF3F51BA10A}">
+      <p15:sldGuideLst xmlns:p15="http://schemas.microsoft.com/office/powerpoint/2012/main"/>
+    </p:ext>
+  </p:extLst>
 </p:presentation>
 </file>
 
@@ -3999,6 +4004,37 @@
           <a:xfrm>
             <a:off x="515954" y="882479"/>
             <a:ext cx="4247775" cy="4254391"/>
+          </a:xfrm>
+          <a:prstGeom prst="rect">
+            <a:avLst/>
+          </a:prstGeom>
+        </p:spPr>
+      </p:pic>
+      <p:pic>
+        <p:nvPicPr>
+          <p:cNvPr id="4" name="図 3">
+            <a:extLst>
+              <a:ext uri="{FF2B5EF4-FFF2-40B4-BE49-F238E27FC236}">
+                <a16:creationId xmlns:a16="http://schemas.microsoft.com/office/drawing/2014/main" id="{E6EDA703-151F-C172-06D7-43AFE3C0EE0F}"/>
+              </a:ext>
+            </a:extLst>
+          </p:cNvPr>
+          <p:cNvPicPr>
+            <a:picLocks noChangeAspect="1"/>
+          </p:cNvPicPr>
+          <p:nvPr/>
+        </p:nvPicPr>
+        <p:blipFill>
+          <a:blip r:embed="rId3"/>
+          <a:srcRect r="13148"/>
+          <a:stretch>
+            <a:fillRect/>
+          </a:stretch>
+        </p:blipFill>
+        <p:spPr>
+          <a:xfrm>
+            <a:off x="609601" y="4890686"/>
+            <a:ext cx="4009292" cy="666053"/>
           </a:xfrm>
           <a:prstGeom prst="rect">
             <a:avLst/>

--- a/AWSシングルクラウドVer/docs/01_management/sprint2/証跡/Story3-6/Story3-6テスト証跡.pptx
+++ b/AWSシングルクラウドVer/docs/01_management/sprint2/証跡/Story3-6/Story3-6テスト証跡.pptx
@@ -116,6 +116,59 @@
     </p:ext>
   </p:extLst>
 </p:presentation>
+</file>
+
+<file path=ppt/revisionInfo.xml><?xml version="1.0" encoding="utf-8"?>
+<p1510:revInfo xmlns:a="http://schemas.openxmlformats.org/drawingml/2006/main" xmlns:r="http://schemas.openxmlformats.org/officeDocument/2006/relationships" xmlns:p1510="http://schemas.microsoft.com/office/powerpoint/2015/10/main">
+  <p1510:revLst>
+    <p1510:client id="{6CCD96F0-ABBF-48B8-A142-522EB174F080}" v="1" dt="2026-03-29T16:20:54.522"/>
+  </p1510:revLst>
+</p1510:revInfo>
+</file>
+
+<file path=ppt/changesInfos/changesInfo1.xml><?xml version="1.0" encoding="utf-8"?>
+<pc:chgInfo xmlns:a="http://schemas.openxmlformats.org/drawingml/2006/main" xmlns:r="http://schemas.openxmlformats.org/officeDocument/2006/relationships" xmlns:ac="http://schemas.microsoft.com/office/drawing/2013/main/command" xmlns:pc="http://schemas.microsoft.com/office/powerpoint/2013/main/command">
+  <pc:docChgLst>
+    <pc:chgData name="Yuenong Mei(梅 月濃)" userId="e6685a25-1bc5-4a58-8438-cb63b0ea184f" providerId="ADAL" clId="{9EDEA3EC-83F1-4CFE-ACB3-67463D9BC2F6}"/>
+    <pc:docChg chg="modSld">
+      <pc:chgData name="Yuenong Mei(梅 月濃)" userId="e6685a25-1bc5-4a58-8438-cb63b0ea184f" providerId="ADAL" clId="{9EDEA3EC-83F1-4CFE-ACB3-67463D9BC2F6}" dt="2026-03-29T16:20:54.521" v="0" actId="164"/>
+      <pc:docMkLst>
+        <pc:docMk/>
+      </pc:docMkLst>
+      <pc:sldChg chg="addSp modSp">
+        <pc:chgData name="Yuenong Mei(梅 月濃)" userId="e6685a25-1bc5-4a58-8438-cb63b0ea184f" providerId="ADAL" clId="{9EDEA3EC-83F1-4CFE-ACB3-67463D9BC2F6}" dt="2026-03-29T16:20:54.521" v="0" actId="164"/>
+        <pc:sldMkLst>
+          <pc:docMk/>
+          <pc:sldMk cId="4193905885" sldId="260"/>
+        </pc:sldMkLst>
+        <pc:grpChg chg="add mod">
+          <ac:chgData name="Yuenong Mei(梅 月濃)" userId="e6685a25-1bc5-4a58-8438-cb63b0ea184f" providerId="ADAL" clId="{9EDEA3EC-83F1-4CFE-ACB3-67463D9BC2F6}" dt="2026-03-29T16:20:54.521" v="0" actId="164"/>
+          <ac:grpSpMkLst>
+            <pc:docMk/>
+            <pc:sldMk cId="4193905885" sldId="260"/>
+            <ac:grpSpMk id="2" creationId="{18B02A8E-183A-756E-9A79-C3E5E216EC09}"/>
+          </ac:grpSpMkLst>
+        </pc:grpChg>
+        <pc:picChg chg="mod">
+          <ac:chgData name="Yuenong Mei(梅 月濃)" userId="e6685a25-1bc5-4a58-8438-cb63b0ea184f" providerId="ADAL" clId="{9EDEA3EC-83F1-4CFE-ACB3-67463D9BC2F6}" dt="2026-03-29T16:20:54.521" v="0" actId="164"/>
+          <ac:picMkLst>
+            <pc:docMk/>
+            <pc:sldMk cId="4193905885" sldId="260"/>
+            <ac:picMk id="3" creationId="{B6D11B17-CD51-F06D-291B-05136EE9DFBB}"/>
+          </ac:picMkLst>
+        </pc:picChg>
+        <pc:picChg chg="mod">
+          <ac:chgData name="Yuenong Mei(梅 月濃)" userId="e6685a25-1bc5-4a58-8438-cb63b0ea184f" providerId="ADAL" clId="{9EDEA3EC-83F1-4CFE-ACB3-67463D9BC2F6}" dt="2026-03-29T16:20:54.521" v="0" actId="164"/>
+          <ac:picMkLst>
+            <pc:docMk/>
+            <pc:sldMk cId="4193905885" sldId="260"/>
+            <ac:picMk id="4" creationId="{E6EDA703-151F-C172-06D7-43AFE3C0EE0F}"/>
+          </ac:picMkLst>
+        </pc:picChg>
+      </pc:sldChg>
+    </pc:docChg>
+  </pc:docChgLst>
+</pc:chgInfo>
 </file>
 
 <file path=ppt/slideLayouts/slideLayout1.xml><?xml version="1.0" encoding="utf-8"?>
@@ -3980,67 +4033,88 @@
           <a:chExt cx="0" cy="0"/>
         </a:xfrm>
       </p:grpSpPr>
-      <p:pic>
-        <p:nvPicPr>
-          <p:cNvPr id="3" name="図 2">
-            <a:extLst>
-              <a:ext uri="{FF2B5EF4-FFF2-40B4-BE49-F238E27FC236}">
-                <a16:creationId xmlns:a16="http://schemas.microsoft.com/office/drawing/2014/main" id="{B6D11B17-CD51-F06D-291B-05136EE9DFBB}"/>
-              </a:ext>
-            </a:extLst>
-          </p:cNvPr>
-          <p:cNvPicPr>
-            <a:picLocks noChangeAspect="1"/>
-          </p:cNvPicPr>
+      <p:grpSp>
+        <p:nvGrpSpPr>
+          <p:cNvPr id="2" name="グループ化 1">
+            <a:extLst>
+              <a:ext uri="{FF2B5EF4-FFF2-40B4-BE49-F238E27FC236}">
+                <a16:creationId xmlns:a16="http://schemas.microsoft.com/office/drawing/2014/main" id="{18B02A8E-183A-756E-9A79-C3E5E216EC09}"/>
+              </a:ext>
+            </a:extLst>
+          </p:cNvPr>
+          <p:cNvGrpSpPr/>
           <p:nvPr/>
-        </p:nvPicPr>
-        <p:blipFill>
-          <a:blip r:embed="rId2"/>
-          <a:stretch>
-            <a:fillRect/>
-          </a:stretch>
-        </p:blipFill>
-        <p:spPr>
+        </p:nvGrpSpPr>
+        <p:grpSpPr>
           <a:xfrm>
             <a:off x="515954" y="882479"/>
-            <a:ext cx="4247775" cy="4254391"/>
+            <a:ext cx="4247775" cy="4674260"/>
+            <a:chOff x="515954" y="882479"/>
+            <a:chExt cx="4247775" cy="4674260"/>
           </a:xfrm>
-          <a:prstGeom prst="rect">
-            <a:avLst/>
-          </a:prstGeom>
-        </p:spPr>
-      </p:pic>
-      <p:pic>
-        <p:nvPicPr>
-          <p:cNvPr id="4" name="図 3">
-            <a:extLst>
-              <a:ext uri="{FF2B5EF4-FFF2-40B4-BE49-F238E27FC236}">
-                <a16:creationId xmlns:a16="http://schemas.microsoft.com/office/drawing/2014/main" id="{E6EDA703-151F-C172-06D7-43AFE3C0EE0F}"/>
-              </a:ext>
-            </a:extLst>
-          </p:cNvPr>
-          <p:cNvPicPr>
-            <a:picLocks noChangeAspect="1"/>
-          </p:cNvPicPr>
-          <p:nvPr/>
-        </p:nvPicPr>
-        <p:blipFill>
-          <a:blip r:embed="rId3"/>
-          <a:srcRect r="13148"/>
-          <a:stretch>
-            <a:fillRect/>
-          </a:stretch>
-        </p:blipFill>
-        <p:spPr>
-          <a:xfrm>
-            <a:off x="609601" y="4890686"/>
-            <a:ext cx="4009292" cy="666053"/>
-          </a:xfrm>
-          <a:prstGeom prst="rect">
-            <a:avLst/>
-          </a:prstGeom>
-        </p:spPr>
-      </p:pic>
+        </p:grpSpPr>
+        <p:pic>
+          <p:nvPicPr>
+            <p:cNvPr id="3" name="図 2">
+              <a:extLst>
+                <a:ext uri="{FF2B5EF4-FFF2-40B4-BE49-F238E27FC236}">
+                  <a16:creationId xmlns:a16="http://schemas.microsoft.com/office/drawing/2014/main" id="{B6D11B17-CD51-F06D-291B-05136EE9DFBB}"/>
+                </a:ext>
+              </a:extLst>
+            </p:cNvPr>
+            <p:cNvPicPr>
+              <a:picLocks noChangeAspect="1"/>
+            </p:cNvPicPr>
+            <p:nvPr/>
+          </p:nvPicPr>
+          <p:blipFill>
+            <a:blip r:embed="rId2"/>
+            <a:stretch>
+              <a:fillRect/>
+            </a:stretch>
+          </p:blipFill>
+          <p:spPr>
+            <a:xfrm>
+              <a:off x="515954" y="882479"/>
+              <a:ext cx="4247775" cy="4254391"/>
+            </a:xfrm>
+            <a:prstGeom prst="rect">
+              <a:avLst/>
+            </a:prstGeom>
+          </p:spPr>
+        </p:pic>
+        <p:pic>
+          <p:nvPicPr>
+            <p:cNvPr id="4" name="図 3">
+              <a:extLst>
+                <a:ext uri="{FF2B5EF4-FFF2-40B4-BE49-F238E27FC236}">
+                  <a16:creationId xmlns:a16="http://schemas.microsoft.com/office/drawing/2014/main" id="{E6EDA703-151F-C172-06D7-43AFE3C0EE0F}"/>
+                </a:ext>
+              </a:extLst>
+            </p:cNvPr>
+            <p:cNvPicPr>
+              <a:picLocks noChangeAspect="1"/>
+            </p:cNvPicPr>
+            <p:nvPr/>
+          </p:nvPicPr>
+          <p:blipFill>
+            <a:blip r:embed="rId3"/>
+            <a:srcRect r="13148"/>
+            <a:stretch>
+              <a:fillRect/>
+            </a:stretch>
+          </p:blipFill>
+          <p:spPr>
+            <a:xfrm>
+              <a:off x="609601" y="4890686"/>
+              <a:ext cx="4009292" cy="666053"/>
+            </a:xfrm>
+            <a:prstGeom prst="rect">
+              <a:avLst/>
+            </a:prstGeom>
+          </p:spPr>
+        </p:pic>
+      </p:grpSp>
     </p:spTree>
     <p:extLst>
       <p:ext uri="{BB962C8B-B14F-4D97-AF65-F5344CB8AC3E}">
